--- a/final_story/final_deck.pptx
+++ b/final_story/final_deck.pptx
@@ -117,6 +117,11 @@
       </a:defRPr>
     </a:lvl9pPr>
   </p:defaultTextStyle>
+  <p:extLst>
+    <p:ext uri="{EFAFB233-063F-42B5-8137-9DF3F51BA10A}">
+      <p15:sldGuideLst xmlns:p15="http://schemas.microsoft.com/office/powerpoint/2012/main"/>
+    </p:ext>
+  </p:extLst>
 </p:presentation>
 </file>
 
@@ -202,7 +207,7 @@
           <a:p>
             <a:fld id="{B998AEA2-E3C5-449C-AC8B-6C14641749FA}" type="datetimeFigureOut">
               <a:rPr lang="en-IN" smtClean="0"/>
-              <a:t>03-03-2026</a:t>
+              <a:t>04-03-2026</a:t>
             </a:fld>
             <a:endParaRPr lang="en-IN"/>
           </a:p>
@@ -515,7 +520,7 @@
           <a:lstStyle/>
           <a:p>
             <a:r>
-              <a:rPr lang="en-IN"/>
+              <a:rPr lang="en-IN" dirty="0"/>
               <a:t>Image source: AI-generated</a:t>
             </a:r>
           </a:p>
@@ -706,7 +711,7 @@
           <a:p>
             <a:fld id="{89BD5812-2E32-4893-AC77-E43F48962118}" type="datetimeFigureOut">
               <a:rPr lang="en-IN" smtClean="0"/>
-              <a:t>03-03-2026</a:t>
+              <a:t>04-03-2026</a:t>
             </a:fld>
             <a:endParaRPr lang="en-IN"/>
           </a:p>
@@ -906,7 +911,7 @@
           <a:p>
             <a:fld id="{89BD5812-2E32-4893-AC77-E43F48962118}" type="datetimeFigureOut">
               <a:rPr lang="en-IN" smtClean="0"/>
-              <a:t>03-03-2026</a:t>
+              <a:t>04-03-2026</a:t>
             </a:fld>
             <a:endParaRPr lang="en-IN"/>
           </a:p>
@@ -1116,7 +1121,7 @@
           <a:p>
             <a:fld id="{89BD5812-2E32-4893-AC77-E43F48962118}" type="datetimeFigureOut">
               <a:rPr lang="en-IN" smtClean="0"/>
-              <a:t>03-03-2026</a:t>
+              <a:t>04-03-2026</a:t>
             </a:fld>
             <a:endParaRPr lang="en-IN"/>
           </a:p>
@@ -1481,7 +1486,7 @@
           <a:p>
             <a:fld id="{833FF731-0671-4E16-83B5-1527EB111BED}" type="datetime1">
               <a:rPr lang="en-US" smtClean="0"/>
-              <a:t>3/3/2026</a:t>
+              <a:t>3/4/2026</a:t>
             </a:fld>
             <a:endParaRPr lang="en-US" dirty="0"/>
           </a:p>
@@ -1699,7 +1704,7 @@
           <a:p>
             <a:fld id="{89BD5812-2E32-4893-AC77-E43F48962118}" type="datetimeFigureOut">
               <a:rPr lang="en-IN" smtClean="0"/>
-              <a:t>03-03-2026</a:t>
+              <a:t>04-03-2026</a:t>
             </a:fld>
             <a:endParaRPr lang="en-IN"/>
           </a:p>
@@ -1975,7 +1980,7 @@
           <a:p>
             <a:fld id="{89BD5812-2E32-4893-AC77-E43F48962118}" type="datetimeFigureOut">
               <a:rPr lang="en-IN" smtClean="0"/>
-              <a:t>03-03-2026</a:t>
+              <a:t>04-03-2026</a:t>
             </a:fld>
             <a:endParaRPr lang="en-IN"/>
           </a:p>
@@ -2243,7 +2248,7 @@
           <a:p>
             <a:fld id="{89BD5812-2E32-4893-AC77-E43F48962118}" type="datetimeFigureOut">
               <a:rPr lang="en-IN" smtClean="0"/>
-              <a:t>03-03-2026</a:t>
+              <a:t>04-03-2026</a:t>
             </a:fld>
             <a:endParaRPr lang="en-IN"/>
           </a:p>
@@ -2658,7 +2663,7 @@
           <a:p>
             <a:fld id="{89BD5812-2E32-4893-AC77-E43F48962118}" type="datetimeFigureOut">
               <a:rPr lang="en-IN" smtClean="0"/>
-              <a:t>03-03-2026</a:t>
+              <a:t>04-03-2026</a:t>
             </a:fld>
             <a:endParaRPr lang="en-IN"/>
           </a:p>
@@ -2800,7 +2805,7 @@
           <a:p>
             <a:fld id="{89BD5812-2E32-4893-AC77-E43F48962118}" type="datetimeFigureOut">
               <a:rPr lang="en-IN" smtClean="0"/>
-              <a:t>03-03-2026</a:t>
+              <a:t>04-03-2026</a:t>
             </a:fld>
             <a:endParaRPr lang="en-IN"/>
           </a:p>
@@ -2913,7 +2918,7 @@
           <a:p>
             <a:fld id="{89BD5812-2E32-4893-AC77-E43F48962118}" type="datetimeFigureOut">
               <a:rPr lang="en-IN" smtClean="0"/>
-              <a:t>03-03-2026</a:t>
+              <a:t>04-03-2026</a:t>
             </a:fld>
             <a:endParaRPr lang="en-IN"/>
           </a:p>
@@ -3226,7 +3231,7 @@
           <a:p>
             <a:fld id="{89BD5812-2E32-4893-AC77-E43F48962118}" type="datetimeFigureOut">
               <a:rPr lang="en-IN" smtClean="0"/>
-              <a:t>03-03-2026</a:t>
+              <a:t>04-03-2026</a:t>
             </a:fld>
             <a:endParaRPr lang="en-IN"/>
           </a:p>
@@ -3515,7 +3520,7 @@
           <a:p>
             <a:fld id="{89BD5812-2E32-4893-AC77-E43F48962118}" type="datetimeFigureOut">
               <a:rPr lang="en-IN" smtClean="0"/>
-              <a:t>03-03-2026</a:t>
+              <a:t>04-03-2026</a:t>
             </a:fld>
             <a:endParaRPr lang="en-IN"/>
           </a:p>
@@ -3758,7 +3763,7 @@
           <a:p>
             <a:fld id="{89BD5812-2E32-4893-AC77-E43F48962118}" type="datetimeFigureOut">
               <a:rPr lang="en-IN" smtClean="0"/>
-              <a:t>03-03-2026</a:t>
+              <a:t>04-03-2026</a:t>
             </a:fld>
             <a:endParaRPr lang="en-IN"/>
           </a:p>
@@ -4214,44 +4219,6 @@
           </a:prstGeom>
         </p:spPr>
       </p:pic>
-      <p:pic>
-        <p:nvPicPr>
-          <p:cNvPr id="8" name="Content Placeholder 7" descr="A modern warehouse interior with tall shelves filled with organized inventory, automated robotics moving boxes, and digital data overlays suggesting analytics and forecasting. The lighting is bright and professional, with a clear space in the center for overlay text. No visible or implied text, letters, or words should appear anywhere in the image. The composition should convey efficiency, technology, and a premium business environment">
-            <a:extLst>
-              <a:ext uri="{FF2B5EF4-FFF2-40B4-BE49-F238E27FC236}">
-                <a16:creationId xmlns:a16="http://schemas.microsoft.com/office/drawing/2014/main" id="{FC30DF69-4D95-498F-B51B-87EB7DF9E2C6}"/>
-              </a:ext>
-            </a:extLst>
-          </p:cNvPr>
-          <p:cNvPicPr>
-            <a:picLocks noGrp="1" noChangeAspect="1"/>
-          </p:cNvPicPr>
-          <p:nvPr>
-            <p:ph sz="quarter" idx="16"/>
-          </p:nvPr>
-        </p:nvPicPr>
-        <p:blipFill>
-          <a:blip r:embed="rId5">
-            <a:extLst>
-              <a:ext uri="{96DAC541-7B7A-43D3-8B79-37D633B846F1}">
-                <asvg:svgBlip xmlns:asvg="http://schemas.microsoft.com/office/drawing/2016/SVG/main" r:embed="rId6"/>
-              </a:ext>
-            </a:extLst>
-          </a:blip>
-          <a:stretch>
-            <a:fillRect/>
-          </a:stretch>
-        </p:blipFill>
-        <p:spPr>
-          <a:xfrm>
-            <a:off x="5334000" y="0"/>
-            <a:ext cx="6858000" cy="6858000"/>
-          </a:xfrm>
-          <a:prstGeom prst="rect">
-            <a:avLst/>
-          </a:prstGeom>
-        </p:spPr>
-      </p:pic>
       <p:sp>
         <p:nvSpPr>
           <p:cNvPr id="6" name="Slide Number Placeholder 5">
@@ -4305,7 +4272,7 @@
         </p:spPr>
         <p:txBody>
           <a:bodyPr wrap="square" rtlCol="0">
-            <a:normAutofit fontScale="92500" lnSpcReduction="10000"/>
+            <a:normAutofit/>
           </a:bodyPr>
           <a:lstStyle/>
           <a:p>
@@ -4313,22 +4280,25 @@
               <a:buNone/>
             </a:pPr>
             <a:r>
-              <a:rPr sz="4800" b="0">
+              <a:rPr sz="4000" b="0" dirty="0">
                 <a:solidFill>
                   <a:srgbClr val="000000"/>
                 </a:solidFill>
                 <a:effectLst/>
-                <a:latin typeface="Mongolian Baiti" panose="03000500000000000000" pitchFamily="66" charset="0"/>
+                <a:latin typeface="+mj-lt"/>
               </a:rPr>
               <a:t>Optimizing Inventory Management</a:t>
             </a:r>
             <a:r>
-              <a:rPr>
+              <a:rPr sz="4000" dirty="0">
                 <a:effectLst/>
+                <a:latin typeface="+mj-lt"/>
               </a:rPr>
               <a:t> </a:t>
             </a:r>
-            <a:endParaRPr lang="en-IN"/>
+            <a:endParaRPr lang="en-IN" sz="4000" dirty="0">
+              <a:latin typeface="+mj-lt"/>
+            </a:endParaRPr>
           </a:p>
         </p:txBody>
       </p:sp>
@@ -4383,6 +4353,61 @@
           </a:p>
         </p:txBody>
       </p:sp>
+      <p:sp>
+        <p:nvSpPr>
+          <p:cNvPr id="3" name="Content Placeholder 2">
+            <a:extLst>
+              <a:ext uri="{FF2B5EF4-FFF2-40B4-BE49-F238E27FC236}">
+                <a16:creationId xmlns:a16="http://schemas.microsoft.com/office/drawing/2014/main" id="{F7CB2EAC-4D2A-4626-6585-4CAFF7DBC120}"/>
+              </a:ext>
+            </a:extLst>
+          </p:cNvPr>
+          <p:cNvSpPr>
+            <a:spLocks noGrp="1"/>
+          </p:cNvSpPr>
+          <p:nvPr>
+            <p:ph sz="quarter" idx="16"/>
+          </p:nvPr>
+        </p:nvSpPr>
+        <p:spPr/>
+        <p:txBody>
+          <a:bodyPr/>
+          <a:lstStyle/>
+          <a:p>
+            <a:endParaRPr lang="en-IN"/>
+          </a:p>
+        </p:txBody>
+      </p:sp>
+      <p:pic>
+        <p:nvPicPr>
+          <p:cNvPr id="5" name="Picture 4">
+            <a:extLst>
+              <a:ext uri="{FF2B5EF4-FFF2-40B4-BE49-F238E27FC236}">
+                <a16:creationId xmlns:a16="http://schemas.microsoft.com/office/drawing/2014/main" id="{996EF3F4-B19E-D0F2-FA72-75328D43110C}"/>
+              </a:ext>
+            </a:extLst>
+          </p:cNvPr>
+          <p:cNvPicPr>
+            <a:picLocks noChangeAspect="1"/>
+          </p:cNvPicPr>
+          <p:nvPr/>
+        </p:nvPicPr>
+        <p:blipFill>
+          <a:blip r:embed="rId5"/>
+          <a:stretch>
+            <a:fillRect/>
+          </a:stretch>
+        </p:blipFill>
+        <p:spPr>
+          <a:xfrm>
+            <a:off x="5801031" y="0"/>
+            <a:ext cx="6390969" cy="6857998"/>
+          </a:xfrm>
+          <a:prstGeom prst="rect">
+            <a:avLst/>
+          </a:prstGeom>
+        </p:spPr>
+      </p:pic>
     </p:spTree>
     <p:extLst>
       <p:ext uri="{BB962C8B-B14F-4D97-AF65-F5344CB8AC3E}">
